--- a/Images/bmc_nordpool.pptx
+++ b/Images/bmc_nordpool.pptx
@@ -2863,7 +2863,7 @@
             </a:pPr>
             <a:r>
               <a:rPr sz="1150" b="0"/>
-              <a:t>• Note: futures revenue accrues to the Euronext group</a:t>
+              <a:t>• Futures: Nord Pool supplies the underlying prices; revenue split with Euronext not public</a:t>
             </a:r>
           </a:p>
         </p:txBody>
@@ -3155,7 +3155,7 @@
             </a:pPr>
             <a:r>
               <a:rPr sz="1150" b="0"/>
-              <a:t>• Owner TSOs (34%): Statnett, Svenska kraftnät, EPSO-G</a:t>
+              <a:t>• Owner TSOs (34%): Statnett, Svenska kraftnät, Litgrid (via EPSO-G)</a:t>
             </a:r>
           </a:p>
           <a:p>
